--- a/analyses/figures/zarchive/conceptual_figure.pptx
+++ b/analyses/figures/zarchive/conceptual_figure.pptx
@@ -104,6 +104,11 @@
       </a:defRPr>
     </a:lvl9pPr>
   </p:defaultTextStyle>
+  <p:extLst>
+    <p:ext uri="{EFAFB233-063F-42B5-8137-9DF3F51BA10A}">
+      <p15:sldGuideLst xmlns:p15="http://schemas.microsoft.com/office/powerpoint/2012/main"/>
+    </p:ext>
+  </p:extLst>
 </p:presentation>
 </file>
 
@@ -238,7 +243,7 @@
           <a:p>
             <a:fld id="{518A7CF5-E3F0-0949-A439-DA240A342436}" type="datetimeFigureOut">
               <a:rPr lang="en-US" smtClean="0"/>
-              <a:t>2/18/26</a:t>
+              <a:t>3/23/26</a:t>
             </a:fld>
             <a:endParaRPr lang="en-US"/>
           </a:p>
@@ -408,7 +413,7 @@
           <a:p>
             <a:fld id="{518A7CF5-E3F0-0949-A439-DA240A342436}" type="datetimeFigureOut">
               <a:rPr lang="en-US" smtClean="0"/>
-              <a:t>2/18/26</a:t>
+              <a:t>3/23/26</a:t>
             </a:fld>
             <a:endParaRPr lang="en-US"/>
           </a:p>
@@ -588,7 +593,7 @@
           <a:p>
             <a:fld id="{518A7CF5-E3F0-0949-A439-DA240A342436}" type="datetimeFigureOut">
               <a:rPr lang="en-US" smtClean="0"/>
-              <a:t>2/18/26</a:t>
+              <a:t>3/23/26</a:t>
             </a:fld>
             <a:endParaRPr lang="en-US"/>
           </a:p>
@@ -758,7 +763,7 @@
           <a:p>
             <a:fld id="{518A7CF5-E3F0-0949-A439-DA240A342436}" type="datetimeFigureOut">
               <a:rPr lang="en-US" smtClean="0"/>
-              <a:t>2/18/26</a:t>
+              <a:t>3/23/26</a:t>
             </a:fld>
             <a:endParaRPr lang="en-US"/>
           </a:p>
@@ -1004,7 +1009,7 @@
           <a:p>
             <a:fld id="{518A7CF5-E3F0-0949-A439-DA240A342436}" type="datetimeFigureOut">
               <a:rPr lang="en-US" smtClean="0"/>
-              <a:t>2/18/26</a:t>
+              <a:t>3/23/26</a:t>
             </a:fld>
             <a:endParaRPr lang="en-US"/>
           </a:p>
@@ -1236,7 +1241,7 @@
           <a:p>
             <a:fld id="{518A7CF5-E3F0-0949-A439-DA240A342436}" type="datetimeFigureOut">
               <a:rPr lang="en-US" smtClean="0"/>
-              <a:t>2/18/26</a:t>
+              <a:t>3/23/26</a:t>
             </a:fld>
             <a:endParaRPr lang="en-US"/>
           </a:p>
@@ -1603,7 +1608,7 @@
           <a:p>
             <a:fld id="{518A7CF5-E3F0-0949-A439-DA240A342436}" type="datetimeFigureOut">
               <a:rPr lang="en-US" smtClean="0"/>
-              <a:t>2/18/26</a:t>
+              <a:t>3/23/26</a:t>
             </a:fld>
             <a:endParaRPr lang="en-US"/>
           </a:p>
@@ -1721,7 +1726,7 @@
           <a:p>
             <a:fld id="{518A7CF5-E3F0-0949-A439-DA240A342436}" type="datetimeFigureOut">
               <a:rPr lang="en-US" smtClean="0"/>
-              <a:t>2/18/26</a:t>
+              <a:t>3/23/26</a:t>
             </a:fld>
             <a:endParaRPr lang="en-US"/>
           </a:p>
@@ -1816,7 +1821,7 @@
           <a:p>
             <a:fld id="{518A7CF5-E3F0-0949-A439-DA240A342436}" type="datetimeFigureOut">
               <a:rPr lang="en-US" smtClean="0"/>
-              <a:t>2/18/26</a:t>
+              <a:t>3/23/26</a:t>
             </a:fld>
             <a:endParaRPr lang="en-US"/>
           </a:p>
@@ -2093,7 +2098,7 @@
           <a:p>
             <a:fld id="{518A7CF5-E3F0-0949-A439-DA240A342436}" type="datetimeFigureOut">
               <a:rPr lang="en-US" smtClean="0"/>
-              <a:t>2/18/26</a:t>
+              <a:t>3/23/26</a:t>
             </a:fld>
             <a:endParaRPr lang="en-US"/>
           </a:p>
@@ -2350,7 +2355,7 @@
           <a:p>
             <a:fld id="{518A7CF5-E3F0-0949-A439-DA240A342436}" type="datetimeFigureOut">
               <a:rPr lang="en-US" smtClean="0"/>
-              <a:t>2/18/26</a:t>
+              <a:t>3/23/26</a:t>
             </a:fld>
             <a:endParaRPr lang="en-US"/>
           </a:p>
@@ -2563,7 +2568,7 @@
           <a:p>
             <a:fld id="{518A7CF5-E3F0-0949-A439-DA240A342436}" type="datetimeFigureOut">
               <a:rPr lang="en-US" smtClean="0"/>
-              <a:t>2/18/26</a:t>
+              <a:t>3/23/26</a:t>
             </a:fld>
             <a:endParaRPr lang="en-US"/>
           </a:p>
@@ -2982,7 +2987,7 @@
         </p:nvSpPr>
         <p:spPr>
           <a:xfrm>
-            <a:off x="498323" y="267906"/>
+            <a:off x="880706" y="267906"/>
             <a:ext cx="2175641" cy="778648"/>
           </a:xfrm>
           <a:prstGeom prst="rect">
@@ -3034,7 +3039,7 @@
         </p:nvSpPr>
         <p:spPr>
           <a:xfrm>
-            <a:off x="5650195" y="247170"/>
+            <a:off x="6032578" y="247170"/>
             <a:ext cx="2175640" cy="778623"/>
           </a:xfrm>
           <a:prstGeom prst="rect">
@@ -12652,7 +12657,7 @@
         </p:nvSpPr>
         <p:spPr>
           <a:xfrm>
-            <a:off x="15327706" y="267906"/>
+            <a:off x="15710089" y="267906"/>
             <a:ext cx="2175640" cy="778623"/>
           </a:xfrm>
           <a:prstGeom prst="rect">
@@ -12703,7 +12708,7 @@
         </p:nvSpPr>
         <p:spPr>
           <a:xfrm>
-            <a:off x="10505085" y="276004"/>
+            <a:off x="10887468" y="276004"/>
             <a:ext cx="2175640" cy="778623"/>
           </a:xfrm>
           <a:prstGeom prst="rect">
@@ -22565,6 +22570,146 @@
           </a:p>
         </p:txBody>
       </p:sp>
+      <p:sp>
+        <p:nvSpPr>
+          <p:cNvPr id="2" name="TextBox 1">
+            <a:extLst>
+              <a:ext uri="{FF2B5EF4-FFF2-40B4-BE49-F238E27FC236}">
+                <a16:creationId xmlns:a16="http://schemas.microsoft.com/office/drawing/2014/main" id="{1B8C0455-4508-6718-8020-F52D403505A4}"/>
+              </a:ext>
+            </a:extLst>
+          </p:cNvPr>
+          <p:cNvSpPr txBox="1"/>
+          <p:nvPr/>
+        </p:nvSpPr>
+        <p:spPr>
+          <a:xfrm>
+            <a:off x="100532" y="16336"/>
+            <a:ext cx="396262" cy="523220"/>
+          </a:xfrm>
+          <a:prstGeom prst="rect">
+            <a:avLst/>
+          </a:prstGeom>
+          <a:noFill/>
+        </p:spPr>
+        <p:txBody>
+          <a:bodyPr wrap="none" rtlCol="0">
+            <a:spAutoFit/>
+          </a:bodyPr>
+          <a:lstStyle/>
+          <a:p>
+            <a:r>
+              <a:rPr lang="en-US" sz="2800" b="1" dirty="0"/>
+              <a:t>I)</a:t>
+            </a:r>
+          </a:p>
+        </p:txBody>
+      </p:sp>
+      <p:sp>
+        <p:nvSpPr>
+          <p:cNvPr id="3" name="TextBox 2">
+            <a:extLst>
+              <a:ext uri="{FF2B5EF4-FFF2-40B4-BE49-F238E27FC236}">
+                <a16:creationId xmlns:a16="http://schemas.microsoft.com/office/drawing/2014/main" id="{AEDA5FC8-637C-4D1B-2EF9-6C02CFB490BA}"/>
+              </a:ext>
+            </a:extLst>
+          </p:cNvPr>
+          <p:cNvSpPr txBox="1"/>
+          <p:nvPr/>
+        </p:nvSpPr>
+        <p:spPr>
+          <a:xfrm>
+            <a:off x="5109427" y="16337"/>
+            <a:ext cx="502061" cy="523220"/>
+          </a:xfrm>
+          <a:prstGeom prst="rect">
+            <a:avLst/>
+          </a:prstGeom>
+          <a:noFill/>
+        </p:spPr>
+        <p:txBody>
+          <a:bodyPr wrap="none" rtlCol="0">
+            <a:spAutoFit/>
+          </a:bodyPr>
+          <a:lstStyle/>
+          <a:p>
+            <a:r>
+              <a:rPr lang="en-US" sz="2800" b="1" dirty="0"/>
+              <a:t>II)</a:t>
+            </a:r>
+          </a:p>
+        </p:txBody>
+      </p:sp>
+      <p:sp>
+        <p:nvSpPr>
+          <p:cNvPr id="5" name="TextBox 4">
+            <a:extLst>
+              <a:ext uri="{FF2B5EF4-FFF2-40B4-BE49-F238E27FC236}">
+                <a16:creationId xmlns:a16="http://schemas.microsoft.com/office/drawing/2014/main" id="{EB68B572-4CE2-D3A8-9027-AAAACC2191F9}"/>
+              </a:ext>
+            </a:extLst>
+          </p:cNvPr>
+          <p:cNvSpPr txBox="1"/>
+          <p:nvPr/>
+        </p:nvSpPr>
+        <p:spPr>
+          <a:xfrm>
+            <a:off x="9936220" y="16336"/>
+            <a:ext cx="607859" cy="523220"/>
+          </a:xfrm>
+          <a:prstGeom prst="rect">
+            <a:avLst/>
+          </a:prstGeom>
+          <a:noFill/>
+        </p:spPr>
+        <p:txBody>
+          <a:bodyPr wrap="none" rtlCol="0">
+            <a:spAutoFit/>
+          </a:bodyPr>
+          <a:lstStyle/>
+          <a:p>
+            <a:r>
+              <a:rPr lang="en-US" sz="2800" b="1" dirty="0"/>
+              <a:t>III)</a:t>
+            </a:r>
+          </a:p>
+        </p:txBody>
+      </p:sp>
+      <p:sp>
+        <p:nvSpPr>
+          <p:cNvPr id="6" name="TextBox 5">
+            <a:extLst>
+              <a:ext uri="{FF2B5EF4-FFF2-40B4-BE49-F238E27FC236}">
+                <a16:creationId xmlns:a16="http://schemas.microsoft.com/office/drawing/2014/main" id="{DC070409-4C4D-4A4E-685A-2C88A6683AAD}"/>
+              </a:ext>
+            </a:extLst>
+          </p:cNvPr>
+          <p:cNvSpPr txBox="1"/>
+          <p:nvPr/>
+        </p:nvSpPr>
+        <p:spPr>
+          <a:xfrm>
+            <a:off x="14852782" y="16336"/>
+            <a:ext cx="622030" cy="523220"/>
+          </a:xfrm>
+          <a:prstGeom prst="rect">
+            <a:avLst/>
+          </a:prstGeom>
+          <a:noFill/>
+        </p:spPr>
+        <p:txBody>
+          <a:bodyPr wrap="none" rtlCol="0">
+            <a:spAutoFit/>
+          </a:bodyPr>
+          <a:lstStyle/>
+          <a:p>
+            <a:r>
+              <a:rPr lang="en-US" sz="2800" b="1" dirty="0"/>
+              <a:t>IV)</a:t>
+            </a:r>
+          </a:p>
+        </p:txBody>
+      </p:sp>
     </p:spTree>
     <p:extLst>
       <p:ext uri="{BB962C8B-B14F-4D97-AF65-F5344CB8AC3E}">
